--- a/lectures/b02/ppt/b02-l09.pptx
+++ b/lectures/b02/ppt/b02-l09.pptx
@@ -11809,7 +11809,7 @@
                           <a:ea typeface="Malgun Gothic"/>
                           <a:cs typeface="Malgun Gothic"/>
                         </a:rPr>
-                        <a:t>레카네맙·도나네맙(B08 L04)</a:t>
+                        <a:t>레카네맙·도나네맙(B08 L07)</a:t>
                       </a:r>
                     </a:p>
                   </a:txBody>
@@ -11883,7 +11883,7 @@
                           <a:ea typeface="Malgun Gothic"/>
                           <a:cs typeface="Malgun Gothic"/>
                         </a:rPr>
-                        <a:t>레비 소체(B08 L05)</a:t>
+                        <a:t>레비 소체(B08 L08)</a:t>
                       </a:r>
                     </a:p>
                   </a:txBody>
@@ -11957,7 +11957,7 @@
                           <a:ea typeface="Malgun Gothic"/>
                           <a:cs typeface="Malgun Gothic"/>
                         </a:rPr>
-                        <a:t>전염성 형태 주형(B08 L07)</a:t>
+                        <a:t>전염성 형태 주형(B08 L10)</a:t>
                       </a:r>
                     </a:p>
                   </a:txBody>
